--- a/modulo-02/02.09 - Adicionando Documentação ao Código ABAP (ABAP Doc)/02.09_Documentando_o_código_com_ABAP_Doc.pptx
+++ b/modulo-02/02.09 - Adicionando Documentação ao Código ABAP (ABAP Doc)/02.09_Documentando_o_código_com_ABAP_Doc.pptx
@@ -1461,7 +1461,7 @@
                   <a:srgbClr val="8FA3C7"/>
                 </a:solidFill>
               </a:rPr>
-              <a:t>ABAP Moderno · Módulo 04 — Programação ABAP Intermediária  ·  Aula 9 de 9 — ABAP Doc</a:t>
+              <a:t>ABAP Moderno · Módulo 02 — Programação ABAP Intermediária  ·  Aula 9 de 9 — ABAP Doc</a:t>
             </a:r>
             <a:endParaRPr lang="en-US" sz="900" dirty="0"/>
           </a:p>
@@ -1607,7 +1607,7 @@
                   <a:srgbClr val="556B82"/>
                 </a:solidFill>
               </a:rPr>
-              <a:t>ABAP Moderno · Módulo 04 — Programação ABAP Intermediária  ·  Aula 9 de 9 — ABAP Doc</a:t>
+              <a:t>ABAP Moderno · Módulo 02 — Programação ABAP Intermediária  ·  Aula 9 de 9 — ABAP Doc</a:t>
             </a:r>
             <a:endParaRPr lang="en-US" sz="900" dirty="0"/>
           </a:p>
@@ -2038,7 +2038,7 @@
                   <a:srgbClr val="89D1FF"/>
                 </a:solidFill>
               </a:rPr>
-              <a:t>MÓDULO 04 · AULA 09 DE 09</a:t>
+              <a:t>MÓDULO 02 · AULA 09 DE 09</a:t>
             </a:r>
             <a:endParaRPr lang="en-US" sz="1400" dirty="0"/>
           </a:p>
@@ -2424,7 +2424,7 @@
                   <a:srgbClr val="8FA3C7"/>
                 </a:solidFill>
               </a:rPr>
-              <a:t>ABAP Moderno · Módulo 04 — Programação ABAP Intermediária · Design System SAP Horizon</a:t>
+              <a:t>ABAP Moderno · Módulo 02 — Programação ABAP Intermediária · Design System SAP Horizon</a:t>
             </a:r>
             <a:endParaRPr lang="en-US" sz="1100" dirty="0"/>
           </a:p>
@@ -2545,7 +2545,7 @@
                   <a:srgbClr val="FFFFFF"/>
                 </a:solidFill>
               </a:rPr>
-              <a:t>O que aprendemos na aula 04.09</a:t>
+              <a:t>O que aprendemos na aula 02.09</a:t>
             </a:r>
             <a:endParaRPr lang="en-US" sz="3200" dirty="0"/>
           </a:p>
@@ -3146,7 +3146,7 @@
                   <a:srgbClr val="FFFFFF"/>
                 </a:solidFill>
               </a:rPr>
-              <a:t>Módulo 02 (ordem recomendada): modelagem de dados com Dicionário ABAP e CDS.</a:t>
+              <a:t>Módulo 03: modelagem de dados com Dicionário ABAP e CDS.</a:t>
             </a:r>
             <a:endParaRPr lang="en-US" sz="1500" dirty="0"/>
           </a:p>
@@ -3216,7 +3216,7 @@
         </p:blipFill>
         <p:spPr>
           <a:xfrm>
-            <a:off x="822960" y="2926080"/>
+            <a:off x="6355080" y="2926080"/>
             <a:ext cx="256032" cy="256032"/>
           </a:xfrm>
           <a:prstGeom prst="rect">
@@ -3240,7 +3240,7 @@
         </p:blipFill>
         <p:spPr>
           <a:xfrm>
-            <a:off x="6355080" y="2926080"/>
+            <a:off x="822960" y="2926080"/>
             <a:ext cx="256032" cy="256032"/>
           </a:xfrm>
           <a:prstGeom prst="rect">
@@ -3264,7 +3264,7 @@
         </p:blipFill>
         <p:spPr>
           <a:xfrm>
-            <a:off x="6355080" y="3886200"/>
+            <a:off x="822960" y="3886200"/>
             <a:ext cx="256032" cy="256032"/>
           </a:xfrm>
           <a:prstGeom prst="rect">
@@ -3288,7 +3288,7 @@
         </p:blipFill>
         <p:spPr>
           <a:xfrm>
-            <a:off x="822960" y="3886200"/>
+            <a:off x="6355080" y="3886200"/>
             <a:ext cx="256032" cy="256032"/>
           </a:xfrm>
           <a:prstGeom prst="rect">
@@ -3415,7 +3415,7 @@
                   <a:srgbClr val="1D2D3E"/>
                 </a:solidFill>
               </a:rPr>
-              <a:t>Módulo 04 em 9 aulas: ABAP intermediário</a:t>
+              <a:t>Módulo 02 em 9 aulas: ABAP intermediário</a:t>
             </a:r>
             <a:endParaRPr lang="en-US" sz="2800" dirty="0"/>
           </a:p>
@@ -4997,7 +4997,7 @@
                   <a:srgbClr val="1D2D3E"/>
                 </a:solidFill>
               </a:rPr>
-              <a:t>documentamos a classe da companhia aérea e seu factory method para que quem usar o código entenda tudo pelo </a:t>
+              <a:t>documentamos interfaces e métodos do projeto Pedidos de Compras para que quem usar o código entenda tudo pelo </a:t>
             </a:r>
             <a:r>
               <a:rPr lang="en-US" sz="1200" dirty="0">
@@ -5038,7 +5038,7 @@
         </p:blipFill>
         <p:spPr>
           <a:xfrm>
-            <a:off x="4328038" y="1847088"/>
+            <a:off x="6583497" y="1847088"/>
             <a:ext cx="347472" cy="347472"/>
           </a:xfrm>
           <a:prstGeom prst="rect">
@@ -5086,7 +5086,7 @@
         </p:blipFill>
         <p:spPr>
           <a:xfrm>
-            <a:off x="6583497" y="1847088"/>
+            <a:off x="4328038" y="1847088"/>
             <a:ext cx="347472" cy="347472"/>
           </a:xfrm>
           <a:prstGeom prst="rect">
@@ -5158,7 +5158,7 @@
         </p:blipFill>
         <p:spPr>
           <a:xfrm>
-            <a:off x="4328038" y="3858768"/>
+            <a:off x="2072579" y="3858768"/>
             <a:ext cx="347472" cy="347472"/>
           </a:xfrm>
           <a:prstGeom prst="rect">
@@ -5182,7 +5182,7 @@
         </p:blipFill>
         <p:spPr>
           <a:xfrm>
-            <a:off x="2072579" y="3858768"/>
+            <a:off x="6583497" y="3858768"/>
             <a:ext cx="347472" cy="347472"/>
           </a:xfrm>
           <a:prstGeom prst="rect">
@@ -5206,7 +5206,7 @@
         </p:blipFill>
         <p:spPr>
           <a:xfrm>
-            <a:off x="6583497" y="3858768"/>
+            <a:off x="4328038" y="3858768"/>
             <a:ext cx="347472" cy="347472"/>
           </a:xfrm>
           <a:prstGeom prst="rect">
@@ -5230,8 +5230,8 @@
         </p:blipFill>
         <p:spPr>
           <a:xfrm>
-            <a:off x="8838956" y="3858768"/>
-            <a:ext cx="347472" cy="347472"/>
+            <a:off x="749808" y="5751576"/>
+            <a:ext cx="310896" cy="310896"/>
           </a:xfrm>
           <a:prstGeom prst="rect">
             <a:avLst/>
@@ -5254,8 +5254,8 @@
         </p:blipFill>
         <p:spPr>
           <a:xfrm>
-            <a:off x="749808" y="5751576"/>
-            <a:ext cx="310896" cy="310896"/>
+            <a:off x="8838956" y="3858768"/>
+            <a:ext cx="347472" cy="347472"/>
           </a:xfrm>
           <a:prstGeom prst="rect">
             <a:avLst/>
@@ -5957,8 +5957,8 @@
         </p:blipFill>
         <p:spPr>
           <a:xfrm>
-            <a:off x="6562192" y="2577751"/>
-            <a:ext cx="256032" cy="256032"/>
+            <a:off x="749808" y="5176361"/>
+            <a:ext cx="310896" cy="310896"/>
           </a:xfrm>
           <a:prstGeom prst="rect">
             <a:avLst/>
@@ -5981,8 +5981,8 @@
         </p:blipFill>
         <p:spPr>
           <a:xfrm>
-            <a:off x="749808" y="5176361"/>
-            <a:ext cx="310896" cy="310896"/>
+            <a:off x="6562192" y="2577751"/>
+            <a:ext cx="256032" cy="256032"/>
           </a:xfrm>
           <a:prstGeom prst="rect">
             <a:avLst/>
@@ -6111,7 +6111,7 @@
                   <a:srgbClr val="89D1FF"/>
                 </a:solidFill>
               </a:rPr>
-              <a:t>AULA 04.09 · SEÇÃO 1</a:t>
+              <a:t>AULA 02.09 · SEÇÃO 1</a:t>
             </a:r>
             <a:endParaRPr lang="en-US" sz="1300" dirty="0"/>
           </a:p>
@@ -6532,7 +6532,7 @@
                   <a:srgbClr val="0064D9"/>
                 </a:solidFill>
               </a:rPr>
-              <a:t>SINTAXE · EXERCÍCIO OFICIAL</a:t>
+              <a:t>SINTAXE · NO PROJETO</a:t>
             </a:r>
             <a:endParaRPr lang="en-US" sz="1100" dirty="0"/>
           </a:p>
@@ -6570,7 +6570,7 @@
                   <a:srgbClr val="1D2D3E"/>
                 </a:solidFill>
               </a:rPr>
-              <a:t>Documentando a classe e o factory method</a:t>
+              <a:t>Documentando a interface e o método</a:t>
             </a:r>
             <a:endParaRPr lang="en-US" sz="2800" dirty="0"/>
           </a:p>
@@ -6634,7 +6634,7 @@
         <p:spPr>
           <a:xfrm>
             <a:off x="640080" y="1700784"/>
-            <a:ext cx="3163824" cy="292608"/>
+            <a:ext cx="2386584" cy="292608"/>
           </a:xfrm>
           <a:prstGeom prst="rect">
             <a:avLst/>
@@ -6654,7 +6654,7 @@
         <p:spPr>
           <a:xfrm>
             <a:off x="640080" y="1700784"/>
-            <a:ext cx="3163824" cy="27432"/>
+            <a:ext cx="2386584" cy="27432"/>
           </a:xfrm>
           <a:prstGeom prst="rect">
             <a:avLst/>
@@ -6674,7 +6674,7 @@
         <p:spPr>
           <a:xfrm>
             <a:off x="731520" y="1719072"/>
-            <a:ext cx="2980944" cy="274320"/>
+            <a:ext cx="2203704" cy="274320"/>
           </a:xfrm>
           <a:prstGeom prst="rect">
             <a:avLst/>
@@ -6695,7 +6695,7 @@
                   <a:srgbClr val="FFFFFF"/>
                 </a:solidFill>
               </a:rPr>
-              <a:t>zcl_09_solution.clas.locals_imp.abap</a:t>
+              <a:t>zif_pc_numeracao.intf.abap</a:t>
             </a:r>
             <a:endParaRPr lang="en-US" sz="950" dirty="0"/>
           </a:p>
@@ -6731,7 +6731,7 @@
                   <a:srgbClr val="9DA5B4"/>
                 </a:solidFill>
               </a:rPr>
-              <a:t>ZCL_09_SOLUTION › Local Types</a:t>
+              <a:t>ZAVBS_PC_COMMON › ZIF_PC_NUMERACAO (com tags @parameter e @raising)</a:t>
             </a:r>
             <a:endParaRPr lang="en-US" sz="850" dirty="0"/>
           </a:p>
@@ -7057,26 +7057,6 @@
             </a:r>
             <a:endParaRPr lang="en-US" sz="950" dirty="0"/>
           </a:p>
-          <a:p>
-            <a:pPr algn="r" indent="0" marL="0">
-              <a:lnSpc>
-                <a:spcPct val="105000"/>
-              </a:lnSpc>
-              <a:buNone/>
-            </a:pPr>
-            <a:r>
-              <a:rPr lang="en-US" sz="950" dirty="0">
-                <a:solidFill>
-                  <a:srgbClr val="6E7681"/>
-                </a:solidFill>
-                <a:latin typeface="Courier New" pitchFamily="34" charset="0"/>
-                <a:ea typeface="Courier New" pitchFamily="34" charset="-122"/>
-                <a:cs typeface="Courier New" pitchFamily="34" charset="-120"/>
-              </a:rPr>
-              <a:t>16</a:t>
-            </a:r>
-            <a:endParaRPr lang="en-US" sz="950" dirty="0"/>
-          </a:p>
         </p:txBody>
       </p:sp>
       <p:sp>
@@ -7115,7 +7095,7 @@
                 <a:ea typeface="Courier New" pitchFamily="34" charset="-122"/>
                 <a:cs typeface="Courier New" pitchFamily="34" charset="-120"/>
               </a:rPr>
-              <a:t>"! Flight Carrier -</a:t>
+              <a:t>"! Constantes, tipos e métodos públicos de ZCL_PC_NUMERACAO,</a:t>
             </a:r>
             <a:endParaRPr lang="en-US" sz="950" dirty="0"/>
           </a:p>
@@ -7135,7 +7115,7 @@
                 <a:ea typeface="Courier New" pitchFamily="34" charset="-122"/>
                 <a:cs typeface="Courier New" pitchFamily="34" charset="-120"/>
               </a:rPr>
-              <a:t>"! A factory logic ensures that there can only be one instance</a:t>
+              <a:t>"! que implementa esta interface.</a:t>
             </a:r>
             <a:endParaRPr lang="en-US" sz="950" dirty="0"/>
           </a:p>
@@ -7147,15 +7127,70 @@
               <a:buNone/>
             </a:pPr>
             <a:r>
-              <a:rPr lang="en-US" sz="950" i="1" dirty="0">
-                <a:solidFill>
-                  <a:srgbClr val="6A9955"/>
-                </a:solidFill>
-                <a:latin typeface="Courier New" pitchFamily="34" charset="0"/>
-                <a:ea typeface="Courier New" pitchFamily="34" charset="-122"/>
-                <a:cs typeface="Courier New" pitchFamily="34" charset="-120"/>
-              </a:rPr>
-              <a:t>"! for each carrier ID.</a:t>
+              <a:rPr lang="en-US" sz="950" dirty="0">
+                <a:solidFill>
+                  <a:srgbClr val="569CD6"/>
+                </a:solidFill>
+                <a:latin typeface="Courier New" pitchFamily="34" charset="0"/>
+                <a:ea typeface="Courier New" pitchFamily="34" charset="-122"/>
+                <a:cs typeface="Courier New" pitchFamily="34" charset="-120"/>
+              </a:rPr>
+              <a:t>INTERFACE</a:t>
+            </a:r>
+            <a:r>
+              <a:rPr lang="en-US" sz="950" dirty="0">
+                <a:solidFill>
+                  <a:srgbClr val="CCCCCC"/>
+                </a:solidFill>
+                <a:latin typeface="Courier New" pitchFamily="34" charset="0"/>
+                <a:ea typeface="Courier New" pitchFamily="34" charset="-122"/>
+                <a:cs typeface="Courier New" pitchFamily="34" charset="-120"/>
+              </a:rPr>
+              <a:t> </a:t>
+            </a:r>
+            <a:r>
+              <a:rPr lang="en-US" sz="950" dirty="0">
+                <a:solidFill>
+                  <a:srgbClr val="4EC9B0"/>
+                </a:solidFill>
+                <a:latin typeface="Courier New" pitchFamily="34" charset="0"/>
+                <a:ea typeface="Courier New" pitchFamily="34" charset="-122"/>
+                <a:cs typeface="Courier New" pitchFamily="34" charset="-120"/>
+              </a:rPr>
+              <a:t>zif_pc_numeracao</a:t>
+            </a:r>
+            <a:r>
+              <a:rPr lang="en-US" sz="950" dirty="0">
+                <a:solidFill>
+                  <a:srgbClr val="CCCCCC"/>
+                </a:solidFill>
+                <a:latin typeface="Courier New" pitchFamily="34" charset="0"/>
+                <a:ea typeface="Courier New" pitchFamily="34" charset="-122"/>
+                <a:cs typeface="Courier New" pitchFamily="34" charset="-120"/>
+              </a:rPr>
+              <a:t> </a:t>
+            </a:r>
+            <a:r>
+              <a:rPr lang="en-US" sz="950" dirty="0">
+                <a:solidFill>
+                  <a:srgbClr val="569CD6"/>
+                </a:solidFill>
+                <a:latin typeface="Courier New" pitchFamily="34" charset="0"/>
+                <a:ea typeface="Courier New" pitchFamily="34" charset="-122"/>
+                <a:cs typeface="Courier New" pitchFamily="34" charset="-120"/>
+              </a:rPr>
+              <a:t>PUBLIC</a:t>
+            </a:r>
+            <a:r>
+              <a:rPr lang="en-US" sz="950" dirty="0">
+                <a:solidFill>
+                  <a:srgbClr val="CCCCCC"/>
+                </a:solidFill>
+                <a:latin typeface="Courier New" pitchFamily="34" charset="0"/>
+                <a:ea typeface="Courier New" pitchFamily="34" charset="-122"/>
+                <a:cs typeface="Courier New" pitchFamily="34" charset="-120"/>
+              </a:rPr>
+              <a:t>.</a:t>
             </a:r>
             <a:endParaRPr lang="en-US" sz="950" dirty="0"/>
           </a:p>
@@ -7169,13 +7204,24 @@
             <a:r>
               <a:rPr lang="en-US" sz="950" dirty="0">
                 <a:solidFill>
+                  <a:srgbClr val="CCCCCC"/>
+                </a:solidFill>
+                <a:latin typeface="Courier New" pitchFamily="34" charset="0"/>
+                <a:ea typeface="Courier New" pitchFamily="34" charset="-122"/>
+                <a:cs typeface="Courier New" pitchFamily="34" charset="-120"/>
+              </a:rPr>
+              <a:t>  </a:t>
+            </a:r>
+            <a:r>
+              <a:rPr lang="en-US" sz="950" dirty="0">
+                <a:solidFill>
                   <a:srgbClr val="569CD6"/>
                 </a:solidFill>
                 <a:latin typeface="Courier New" pitchFamily="34" charset="0"/>
                 <a:ea typeface="Courier New" pitchFamily="34" charset="-122"/>
                 <a:cs typeface="Courier New" pitchFamily="34" charset="-120"/>
               </a:rPr>
-              <a:t>CLASS</a:t>
+              <a:t>TYPES</a:t>
             </a:r>
             <a:r>
               <a:rPr lang="en-US" sz="950" dirty="0">
@@ -7191,13 +7237,13 @@
             <a:r>
               <a:rPr lang="en-US" sz="950" dirty="0">
                 <a:solidFill>
-                  <a:srgbClr val="4EC9B0"/>
-                </a:solidFill>
-                <a:latin typeface="Courier New" pitchFamily="34" charset="0"/>
-                <a:ea typeface="Courier New" pitchFamily="34" charset="-122"/>
-                <a:cs typeface="Courier New" pitchFamily="34" charset="-120"/>
-              </a:rPr>
-              <a:t>lcl_carrier</a:t>
+                  <a:srgbClr val="CCCCCC"/>
+                </a:solidFill>
+                <a:latin typeface="Courier New" pitchFamily="34" charset="0"/>
+                <a:ea typeface="Courier New" pitchFamily="34" charset="-122"/>
+                <a:cs typeface="Courier New" pitchFamily="34" charset="-120"/>
+              </a:rPr>
+              <a:t>ty_sku</a:t>
             </a:r>
             <a:r>
               <a:rPr lang="en-US" sz="950" dirty="0">
@@ -7219,7 +7265,7 @@
                 <a:ea typeface="Courier New" pitchFamily="34" charset="-122"/>
                 <a:cs typeface="Courier New" pitchFamily="34" charset="-120"/>
               </a:rPr>
-              <a:t>DEFINITION</a:t>
+              <a:t>TYPE</a:t>
             </a:r>
             <a:r>
               <a:rPr lang="en-US" sz="950" dirty="0">
@@ -7235,13 +7281,35 @@
             <a:r>
               <a:rPr lang="en-US" sz="950" dirty="0">
                 <a:solidFill>
+                  <a:srgbClr val="CCCCCC"/>
+                </a:solidFill>
+                <a:latin typeface="Courier New" pitchFamily="34" charset="0"/>
+                <a:ea typeface="Courier New" pitchFamily="34" charset="-122"/>
+                <a:cs typeface="Courier New" pitchFamily="34" charset="-120"/>
+              </a:rPr>
+              <a:t>c</a:t>
+            </a:r>
+            <a:r>
+              <a:rPr lang="en-US" sz="950" dirty="0">
+                <a:solidFill>
+                  <a:srgbClr val="CCCCCC"/>
+                </a:solidFill>
+                <a:latin typeface="Courier New" pitchFamily="34" charset="0"/>
+                <a:ea typeface="Courier New" pitchFamily="34" charset="-122"/>
+                <a:cs typeface="Courier New" pitchFamily="34" charset="-120"/>
+              </a:rPr>
+              <a:t> </a:t>
+            </a:r>
+            <a:r>
+              <a:rPr lang="en-US" sz="950" dirty="0">
+                <a:solidFill>
                   <a:srgbClr val="569CD6"/>
                 </a:solidFill>
                 <a:latin typeface="Courier New" pitchFamily="34" charset="0"/>
                 <a:ea typeface="Courier New" pitchFamily="34" charset="-122"/>
                 <a:cs typeface="Courier New" pitchFamily="34" charset="-120"/>
               </a:rPr>
-              <a:t>CREATE</a:t>
+              <a:t>LENGTH</a:t>
             </a:r>
             <a:r>
               <a:rPr lang="en-US" sz="950" dirty="0">
@@ -7257,13 +7325,13 @@
             <a:r>
               <a:rPr lang="en-US" sz="950" dirty="0">
                 <a:solidFill>
-                  <a:srgbClr val="569CD6"/>
-                </a:solidFill>
-                <a:latin typeface="Courier New" pitchFamily="34" charset="0"/>
-                <a:ea typeface="Courier New" pitchFamily="34" charset="-122"/>
-                <a:cs typeface="Courier New" pitchFamily="34" charset="-120"/>
-              </a:rPr>
-              <a:t>PRIVATE</a:t>
+                  <a:srgbClr val="B5CEA8"/>
+                </a:solidFill>
+                <a:latin typeface="Courier New" pitchFamily="34" charset="0"/>
+                <a:ea typeface="Courier New" pitchFamily="34" charset="-122"/>
+                <a:cs typeface="Courier New" pitchFamily="34" charset="-120"/>
+              </a:rPr>
+              <a:t>21</a:t>
             </a:r>
             <a:r>
               <a:rPr lang="en-US" sz="950" dirty="0">
@@ -7288,57 +7356,13 @@
             <a:r>
               <a:rPr lang="en-US" sz="950" dirty="0">
                 <a:solidFill>
-                  <a:srgbClr val="CCCCCC"/>
-                </a:solidFill>
-                <a:latin typeface="Courier New" pitchFamily="34" charset="0"/>
-                <a:ea typeface="Courier New" pitchFamily="34" charset="-122"/>
-                <a:cs typeface="Courier New" pitchFamily="34" charset="-120"/>
-              </a:rPr>
-              <a:t>  </a:t>
-            </a:r>
-            <a:r>
-              <a:rPr lang="en-US" sz="950" dirty="0">
-                <a:solidFill>
-                  <a:srgbClr val="569CD6"/>
-                </a:solidFill>
-                <a:latin typeface="Courier New" pitchFamily="34" charset="0"/>
-                <a:ea typeface="Courier New" pitchFamily="34" charset="-122"/>
-                <a:cs typeface="Courier New" pitchFamily="34" charset="-120"/>
-              </a:rPr>
-              <a:t>PUBLIC</a:t>
-            </a:r>
-            <a:r>
-              <a:rPr lang="en-US" sz="950" dirty="0">
-                <a:solidFill>
-                  <a:srgbClr val="CCCCCC"/>
+                  <a:srgbClr val="000000"/>
                 </a:solidFill>
                 <a:latin typeface="Courier New" pitchFamily="34" charset="0"/>
                 <a:ea typeface="Courier New" pitchFamily="34" charset="-122"/>
                 <a:cs typeface="Courier New" pitchFamily="34" charset="-120"/>
               </a:rPr>
               <a:t> </a:t>
-            </a:r>
-            <a:r>
-              <a:rPr lang="en-US" sz="950" dirty="0">
-                <a:solidFill>
-                  <a:srgbClr val="569CD6"/>
-                </a:solidFill>
-                <a:latin typeface="Courier New" pitchFamily="34" charset="0"/>
-                <a:ea typeface="Courier New" pitchFamily="34" charset="-122"/>
-                <a:cs typeface="Courier New" pitchFamily="34" charset="-120"/>
-              </a:rPr>
-              <a:t>SECTION</a:t>
-            </a:r>
-            <a:r>
-              <a:rPr lang="en-US" sz="950" dirty="0">
-                <a:solidFill>
-                  <a:srgbClr val="CCCCCC"/>
-                </a:solidFill>
-                <a:latin typeface="Courier New" pitchFamily="34" charset="0"/>
-                <a:ea typeface="Courier New" pitchFamily="34" charset="-122"/>
-                <a:cs typeface="Courier New" pitchFamily="34" charset="-120"/>
-              </a:rPr>
-              <a:t>.</a:t>
             </a:r>
             <a:endParaRPr lang="en-US" sz="950" dirty="0"/>
           </a:p>
@@ -7358,7 +7382,7 @@
                 <a:ea typeface="Courier New" pitchFamily="34" charset="-122"/>
                 <a:cs typeface="Courier New" pitchFamily="34" charset="-120"/>
               </a:rPr>
-              <a:t>    </a:t>
+              <a:t>  </a:t>
             </a:r>
             <a:r>
               <a:rPr lang="en-US" sz="950" i="1" dirty="0">
@@ -7369,7 +7393,7 @@
                 <a:ea typeface="Courier New" pitchFamily="34" charset="-122"/>
                 <a:cs typeface="Courier New" pitchFamily="34" charset="-120"/>
               </a:rPr>
-              <a:t>"! Factory method - returns an instance of this class.</a:t>
+              <a:t>"! SKU no formato SKU-&lt;3 letras da categoria&gt;-&lt;10 dígitos&gt;.</a:t>
             </a:r>
             <a:endParaRPr lang="en-US" sz="950" dirty="0"/>
           </a:p>
@@ -7389,7 +7413,7 @@
                 <a:ea typeface="Courier New" pitchFamily="34" charset="-122"/>
                 <a:cs typeface="Courier New" pitchFamily="34" charset="-120"/>
               </a:rPr>
-              <a:t>    </a:t>
+              <a:t>  </a:t>
             </a:r>
             <a:r>
               <a:rPr lang="en-US" sz="950" i="1" dirty="0">
@@ -7400,7 +7424,7 @@
                 <a:ea typeface="Courier New" pitchFamily="34" charset="-122"/>
                 <a:cs typeface="Courier New" pitchFamily="34" charset="-120"/>
               </a:rPr>
-              <a:t>"! @parameter i_carrier_id | Three-character identification of the carrier.</a:t>
+              <a:t>"! Ex.: SKU-ELE-0000000042 (18 caracteres; campo CHAR 21).</a:t>
             </a:r>
             <a:endParaRPr lang="en-US" sz="950" dirty="0"/>
           </a:p>
@@ -7420,7 +7444,7 @@
                 <a:ea typeface="Courier New" pitchFamily="34" charset="-122"/>
                 <a:cs typeface="Courier New" pitchFamily="34" charset="-120"/>
               </a:rPr>
-              <a:t>    </a:t>
+              <a:t>  </a:t>
             </a:r>
             <a:r>
               <a:rPr lang="en-US" sz="950" i="1" dirty="0">
@@ -7431,7 +7455,7 @@
                 <a:ea typeface="Courier New" pitchFamily="34" charset="-122"/>
                 <a:cs typeface="Courier New" pitchFamily="34" charset="-120"/>
               </a:rPr>
-              <a:t>"! @parameter r_result     | Reference to the instance - initial if</a:t>
+              <a:t>"! @parameter iv_categoria | Código da categoria, ex.: ELETRONICOS.</a:t>
             </a:r>
             <a:endParaRPr lang="en-US" sz="950" dirty="0"/>
           </a:p>
@@ -7451,7 +7475,7 @@
                 <a:ea typeface="Courier New" pitchFamily="34" charset="-122"/>
                 <a:cs typeface="Courier New" pitchFamily="34" charset="-120"/>
               </a:rPr>
-              <a:t>    </a:t>
+              <a:t>  </a:t>
             </a:r>
             <a:r>
               <a:rPr lang="en-US" sz="950" i="1" dirty="0">
@@ -7462,7 +7486,7 @@
                 <a:ea typeface="Courier New" pitchFamily="34" charset="-122"/>
                 <a:cs typeface="Courier New" pitchFamily="34" charset="-120"/>
               </a:rPr>
-              <a:t>"!                           instantiation failed.</a:t>
+              <a:t>"! @parameter rv_sku       | SKU gerado pelo intervalo 02 de ZPC_NR.</a:t>
             </a:r>
             <a:endParaRPr lang="en-US" sz="950" dirty="0"/>
           </a:p>
@@ -7482,7 +7506,7 @@
                 <a:ea typeface="Courier New" pitchFamily="34" charset="-122"/>
                 <a:cs typeface="Courier New" pitchFamily="34" charset="-120"/>
               </a:rPr>
-              <a:t>    </a:t>
+              <a:t>  </a:t>
             </a:r>
             <a:r>
               <a:rPr lang="en-US" sz="950" i="1" dirty="0">
@@ -7493,7 +7517,7 @@
                 <a:ea typeface="Courier New" pitchFamily="34" charset="-122"/>
                 <a:cs typeface="Courier New" pitchFamily="34" charset="-120"/>
               </a:rPr>
-              <a:t>"! @raising zcx_09_failed  | Instantiation failed - evaluate the</a:t>
+              <a:t>"! @raising cx_number_ranges | Intervalo inexistente ou esgotado.</a:t>
             </a:r>
             <a:endParaRPr lang="en-US" sz="950" dirty="0"/>
           </a:p>
@@ -7513,18 +7537,40 @@
                 <a:ea typeface="Courier New" pitchFamily="34" charset="-122"/>
                 <a:cs typeface="Courier New" pitchFamily="34" charset="-120"/>
               </a:rPr>
-              <a:t>    </a:t>
-            </a:r>
-            <a:r>
-              <a:rPr lang="en-US" sz="950" i="1" dirty="0">
-                <a:solidFill>
-                  <a:srgbClr val="6A9955"/>
-                </a:solidFill>
-                <a:latin typeface="Courier New" pitchFamily="34" charset="0"/>
-                <a:ea typeface="Courier New" pitchFamily="34" charset="-122"/>
-                <a:cs typeface="Courier New" pitchFamily="34" charset="-120"/>
-              </a:rPr>
-              <a:t>"!                           exception text for details.</a:t>
+              <a:t>  </a:t>
+            </a:r>
+            <a:r>
+              <a:rPr lang="en-US" sz="950" dirty="0">
+                <a:solidFill>
+                  <a:srgbClr val="569CD6"/>
+                </a:solidFill>
+                <a:latin typeface="Courier New" pitchFamily="34" charset="0"/>
+                <a:ea typeface="Courier New" pitchFamily="34" charset="-122"/>
+                <a:cs typeface="Courier New" pitchFamily="34" charset="-120"/>
+              </a:rPr>
+              <a:t>CLASS-METHODS</a:t>
+            </a:r>
+            <a:r>
+              <a:rPr lang="en-US" sz="950" dirty="0">
+                <a:solidFill>
+                  <a:srgbClr val="CCCCCC"/>
+                </a:solidFill>
+                <a:latin typeface="Courier New" pitchFamily="34" charset="0"/>
+                <a:ea typeface="Courier New" pitchFamily="34" charset="-122"/>
+                <a:cs typeface="Courier New" pitchFamily="34" charset="-120"/>
+              </a:rPr>
+              <a:t> </a:t>
+            </a:r>
+            <a:r>
+              <a:rPr lang="en-US" sz="950" dirty="0">
+                <a:solidFill>
+                  <a:srgbClr val="CCCCCC"/>
+                </a:solidFill>
+                <a:latin typeface="Courier New" pitchFamily="34" charset="0"/>
+                <a:ea typeface="Courier New" pitchFamily="34" charset="-122"/>
+                <a:cs typeface="Courier New" pitchFamily="34" charset="-120"/>
+              </a:rPr>
+              <a:t>gerar_sku</a:t>
             </a:r>
             <a:endParaRPr lang="en-US" sz="950" dirty="0"/>
           </a:p>
@@ -7555,7 +7601,7 @@
                 <a:ea typeface="Courier New" pitchFamily="34" charset="-122"/>
                 <a:cs typeface="Courier New" pitchFamily="34" charset="-120"/>
               </a:rPr>
-              <a:t>CLASS-METHODS</a:t>
+              <a:t>IMPORTING</a:t>
             </a:r>
             <a:r>
               <a:rPr lang="en-US" sz="950" dirty="0">
@@ -7577,7 +7623,51 @@
                 <a:ea typeface="Courier New" pitchFamily="34" charset="-122"/>
                 <a:cs typeface="Courier New" pitchFamily="34" charset="-120"/>
               </a:rPr>
-              <a:t>get_instance</a:t>
+              <a:t>iv_categoria</a:t>
+            </a:r>
+            <a:r>
+              <a:rPr lang="en-US" sz="950" dirty="0">
+                <a:solidFill>
+                  <a:srgbClr val="CCCCCC"/>
+                </a:solidFill>
+                <a:latin typeface="Courier New" pitchFamily="34" charset="0"/>
+                <a:ea typeface="Courier New" pitchFamily="34" charset="-122"/>
+                <a:cs typeface="Courier New" pitchFamily="34" charset="-120"/>
+              </a:rPr>
+              <a:t>  </a:t>
+            </a:r>
+            <a:r>
+              <a:rPr lang="en-US" sz="950" dirty="0">
+                <a:solidFill>
+                  <a:srgbClr val="569CD6"/>
+                </a:solidFill>
+                <a:latin typeface="Courier New" pitchFamily="34" charset="0"/>
+                <a:ea typeface="Courier New" pitchFamily="34" charset="-122"/>
+                <a:cs typeface="Courier New" pitchFamily="34" charset="-120"/>
+              </a:rPr>
+              <a:t>TYPE</a:t>
+            </a:r>
+            <a:r>
+              <a:rPr lang="en-US" sz="950" dirty="0">
+                <a:solidFill>
+                  <a:srgbClr val="CCCCCC"/>
+                </a:solidFill>
+                <a:latin typeface="Courier New" pitchFamily="34" charset="0"/>
+                <a:ea typeface="Courier New" pitchFamily="34" charset="-122"/>
+                <a:cs typeface="Courier New" pitchFamily="34" charset="-120"/>
+              </a:rPr>
+              <a:t> </a:t>
+            </a:r>
+            <a:r>
+              <a:rPr lang="en-US" sz="950" dirty="0">
+                <a:solidFill>
+                  <a:srgbClr val="CCCCCC"/>
+                </a:solidFill>
+                <a:latin typeface="Courier New" pitchFamily="34" charset="0"/>
+                <a:ea typeface="Courier New" pitchFamily="34" charset="-122"/>
+                <a:cs typeface="Courier New" pitchFamily="34" charset="-120"/>
+              </a:rPr>
+              <a:t>csequence</a:t>
             </a:r>
             <a:endParaRPr lang="en-US" sz="950" dirty="0"/>
           </a:p>
@@ -7597,7 +7687,7 @@
                 <a:ea typeface="Courier New" pitchFamily="34" charset="-122"/>
                 <a:cs typeface="Courier New" pitchFamily="34" charset="-120"/>
               </a:rPr>
-              <a:t>      </a:t>
+              <a:t>    </a:t>
             </a:r>
             <a:r>
               <a:rPr lang="en-US" sz="950" dirty="0">
@@ -7608,7 +7698,7 @@
                 <a:ea typeface="Courier New" pitchFamily="34" charset="-122"/>
                 <a:cs typeface="Courier New" pitchFamily="34" charset="-120"/>
               </a:rPr>
-              <a:t>IMPORTING</a:t>
+              <a:t>RETURNING</a:t>
             </a:r>
             <a:r>
               <a:rPr lang="en-US" sz="950" dirty="0">
@@ -7624,13 +7714,24 @@
             <a:r>
               <a:rPr lang="en-US" sz="950" dirty="0">
                 <a:solidFill>
+                  <a:srgbClr val="569CD6"/>
+                </a:solidFill>
+                <a:latin typeface="Courier New" pitchFamily="34" charset="0"/>
+                <a:ea typeface="Courier New" pitchFamily="34" charset="-122"/>
+                <a:cs typeface="Courier New" pitchFamily="34" charset="-120"/>
+              </a:rPr>
+              <a:t>VALUE</a:t>
+            </a:r>
+            <a:r>
+              <a:rPr lang="en-US" sz="950" dirty="0">
+                <a:solidFill>
                   <a:srgbClr val="CCCCCC"/>
                 </a:solidFill>
                 <a:latin typeface="Courier New" pitchFamily="34" charset="0"/>
                 <a:ea typeface="Courier New" pitchFamily="34" charset="-122"/>
                 <a:cs typeface="Courier New" pitchFamily="34" charset="-120"/>
               </a:rPr>
-              <a:t>i_carrier_id</a:t>
+              <a:t>(</a:t>
             </a:r>
             <a:r>
               <a:rPr lang="en-US" sz="950" dirty="0">
@@ -7641,11 +7742,33 @@
                 <a:ea typeface="Courier New" pitchFamily="34" charset="-122"/>
                 <a:cs typeface="Courier New" pitchFamily="34" charset="-120"/>
               </a:rPr>
-              <a:t>    </a:t>
+              <a:t>rv_sku</a:t>
             </a:r>
             <a:r>
               <a:rPr lang="en-US" sz="950" dirty="0">
                 <a:solidFill>
+                  <a:srgbClr val="CCCCCC"/>
+                </a:solidFill>
+                <a:latin typeface="Courier New" pitchFamily="34" charset="0"/>
+                <a:ea typeface="Courier New" pitchFamily="34" charset="-122"/>
+                <a:cs typeface="Courier New" pitchFamily="34" charset="-120"/>
+              </a:rPr>
+              <a:t>)</a:t>
+            </a:r>
+            <a:r>
+              <a:rPr lang="en-US" sz="950" dirty="0">
+                <a:solidFill>
+                  <a:srgbClr val="CCCCCC"/>
+                </a:solidFill>
+                <a:latin typeface="Courier New" pitchFamily="34" charset="0"/>
+                <a:ea typeface="Courier New" pitchFamily="34" charset="-122"/>
+                <a:cs typeface="Courier New" pitchFamily="34" charset="-120"/>
+              </a:rPr>
+              <a:t> </a:t>
+            </a:r>
+            <a:r>
+              <a:rPr lang="en-US" sz="950" dirty="0">
+                <a:solidFill>
                   <a:srgbClr val="569CD6"/>
                 </a:solidFill>
                 <a:latin typeface="Courier New" pitchFamily="34" charset="0"/>
@@ -7668,13 +7791,13 @@
             <a:r>
               <a:rPr lang="en-US" sz="950" dirty="0">
                 <a:solidFill>
-                  <a:srgbClr val="4EC9B0"/>
-                </a:solidFill>
-                <a:latin typeface="Courier New" pitchFamily="34" charset="0"/>
-                <a:ea typeface="Courier New" pitchFamily="34" charset="-122"/>
-                <a:cs typeface="Courier New" pitchFamily="34" charset="-120"/>
-              </a:rPr>
-              <a:t>/dmo/carrier_id</a:t>
+                  <a:srgbClr val="CCCCCC"/>
+                </a:solidFill>
+                <a:latin typeface="Courier New" pitchFamily="34" charset="0"/>
+                <a:ea typeface="Courier New" pitchFamily="34" charset="-122"/>
+                <a:cs typeface="Courier New" pitchFamily="34" charset="-120"/>
+              </a:rPr>
+              <a:t>ty_sku</a:t>
             </a:r>
             <a:endParaRPr lang="en-US" sz="950" dirty="0"/>
           </a:p>
@@ -7694,7 +7817,7 @@
                 <a:ea typeface="Courier New" pitchFamily="34" charset="-122"/>
                 <a:cs typeface="Courier New" pitchFamily="34" charset="-120"/>
               </a:rPr>
-              <a:t>      </a:t>
+              <a:t>    </a:t>
             </a:r>
             <a:r>
               <a:rPr lang="en-US" sz="950" dirty="0">
@@ -7705,7 +7828,7 @@
                 <a:ea typeface="Courier New" pitchFamily="34" charset="-122"/>
                 <a:cs typeface="Courier New" pitchFamily="34" charset="-120"/>
               </a:rPr>
-              <a:t>RETURNING</a:t>
+              <a:t>RAISING</a:t>
             </a:r>
             <a:r>
               <a:rPr lang="en-US" sz="950" dirty="0">
@@ -7716,18 +7839,18 @@
                 <a:ea typeface="Courier New" pitchFamily="34" charset="-122"/>
                 <a:cs typeface="Courier New" pitchFamily="34" charset="-120"/>
               </a:rPr>
-              <a:t> </a:t>
+              <a:t>   </a:t>
             </a:r>
             <a:r>
               <a:rPr lang="en-US" sz="950" dirty="0">
                 <a:solidFill>
-                  <a:srgbClr val="569CD6"/>
-                </a:solidFill>
-                <a:latin typeface="Courier New" pitchFamily="34" charset="0"/>
-                <a:ea typeface="Courier New" pitchFamily="34" charset="-122"/>
-                <a:cs typeface="Courier New" pitchFamily="34" charset="-120"/>
-              </a:rPr>
-              <a:t>VALUE</a:t>
+                  <a:srgbClr val="4EC9B0"/>
+                </a:solidFill>
+                <a:latin typeface="Courier New" pitchFamily="34" charset="0"/>
+                <a:ea typeface="Courier New" pitchFamily="34" charset="-122"/>
+                <a:cs typeface="Courier New" pitchFamily="34" charset="-120"/>
+              </a:rPr>
+              <a:t>cx_number_ranges</a:t>
             </a:r>
             <a:r>
               <a:rPr lang="en-US" sz="950" dirty="0">
@@ -7738,117 +7861,7 @@
                 <a:ea typeface="Courier New" pitchFamily="34" charset="-122"/>
                 <a:cs typeface="Courier New" pitchFamily="34" charset="-120"/>
               </a:rPr>
-              <a:t>(</a:t>
-            </a:r>
-            <a:r>
-              <a:rPr lang="en-US" sz="950" dirty="0">
-                <a:solidFill>
-                  <a:srgbClr val="CCCCCC"/>
-                </a:solidFill>
-                <a:latin typeface="Courier New" pitchFamily="34" charset="0"/>
-                <a:ea typeface="Courier New" pitchFamily="34" charset="-122"/>
-                <a:cs typeface="Courier New" pitchFamily="34" charset="-120"/>
-              </a:rPr>
-              <a:t>r_result</a:t>
-            </a:r>
-            <a:r>
-              <a:rPr lang="en-US" sz="950" dirty="0">
-                <a:solidFill>
-                  <a:srgbClr val="CCCCCC"/>
-                </a:solidFill>
-                <a:latin typeface="Courier New" pitchFamily="34" charset="0"/>
-                <a:ea typeface="Courier New" pitchFamily="34" charset="-122"/>
-                <a:cs typeface="Courier New" pitchFamily="34" charset="-120"/>
-              </a:rPr>
-              <a:t>)</a:t>
-            </a:r>
-            <a:r>
-              <a:rPr lang="en-US" sz="950" dirty="0">
-                <a:solidFill>
-                  <a:srgbClr val="CCCCCC"/>
-                </a:solidFill>
-                <a:latin typeface="Courier New" pitchFamily="34" charset="0"/>
-                <a:ea typeface="Courier New" pitchFamily="34" charset="-122"/>
-                <a:cs typeface="Courier New" pitchFamily="34" charset="-120"/>
-              </a:rPr>
-              <a:t> </a:t>
-            </a:r>
-            <a:r>
-              <a:rPr lang="en-US" sz="950" dirty="0">
-                <a:solidFill>
-                  <a:srgbClr val="569CD6"/>
-                </a:solidFill>
-                <a:latin typeface="Courier New" pitchFamily="34" charset="0"/>
-                <a:ea typeface="Courier New" pitchFamily="34" charset="-122"/>
-                <a:cs typeface="Courier New" pitchFamily="34" charset="-120"/>
-              </a:rPr>
-              <a:t>TYPE</a:t>
-            </a:r>
-            <a:r>
-              <a:rPr lang="en-US" sz="950" dirty="0">
-                <a:solidFill>
-                  <a:srgbClr val="CCCCCC"/>
-                </a:solidFill>
-                <a:latin typeface="Courier New" pitchFamily="34" charset="0"/>
-                <a:ea typeface="Courier New" pitchFamily="34" charset="-122"/>
-                <a:cs typeface="Courier New" pitchFamily="34" charset="-120"/>
-              </a:rPr>
-              <a:t> </a:t>
-            </a:r>
-            <a:r>
-              <a:rPr lang="en-US" sz="950" dirty="0">
-                <a:solidFill>
-                  <a:srgbClr val="569CD6"/>
-                </a:solidFill>
-                <a:latin typeface="Courier New" pitchFamily="34" charset="0"/>
-                <a:ea typeface="Courier New" pitchFamily="34" charset="-122"/>
-                <a:cs typeface="Courier New" pitchFamily="34" charset="-120"/>
-              </a:rPr>
-              <a:t>REF</a:t>
-            </a:r>
-            <a:r>
-              <a:rPr lang="en-US" sz="950" dirty="0">
-                <a:solidFill>
-                  <a:srgbClr val="CCCCCC"/>
-                </a:solidFill>
-                <a:latin typeface="Courier New" pitchFamily="34" charset="0"/>
-                <a:ea typeface="Courier New" pitchFamily="34" charset="-122"/>
-                <a:cs typeface="Courier New" pitchFamily="34" charset="-120"/>
-              </a:rPr>
-              <a:t> </a:t>
-            </a:r>
-            <a:r>
-              <a:rPr lang="en-US" sz="950" dirty="0">
-                <a:solidFill>
-                  <a:srgbClr val="569CD6"/>
-                </a:solidFill>
-                <a:latin typeface="Courier New" pitchFamily="34" charset="0"/>
-                <a:ea typeface="Courier New" pitchFamily="34" charset="-122"/>
-                <a:cs typeface="Courier New" pitchFamily="34" charset="-120"/>
-              </a:rPr>
-              <a:t>TO</a:t>
-            </a:r>
-            <a:r>
-              <a:rPr lang="en-US" sz="950" dirty="0">
-                <a:solidFill>
-                  <a:srgbClr val="CCCCCC"/>
-                </a:solidFill>
-                <a:latin typeface="Courier New" pitchFamily="34" charset="0"/>
-                <a:ea typeface="Courier New" pitchFamily="34" charset="-122"/>
-                <a:cs typeface="Courier New" pitchFamily="34" charset="-120"/>
-              </a:rPr>
-              <a:t> </a:t>
-            </a:r>
-            <a:r>
-              <a:rPr lang="en-US" sz="950" dirty="0">
-                <a:solidFill>
-                  <a:srgbClr val="4EC9B0"/>
-                </a:solidFill>
-                <a:latin typeface="Courier New" pitchFamily="34" charset="0"/>
-                <a:ea typeface="Courier New" pitchFamily="34" charset="-122"/>
-                <a:cs typeface="Courier New" pitchFamily="34" charset="-120"/>
-              </a:rPr>
-              <a:t>lcl_carrier</a:t>
+              <a:t>.</a:t>
             </a:r>
             <a:endParaRPr lang="en-US" sz="950" dirty="0"/>
           </a:p>
@@ -7862,77 +7875,13 @@
             <a:r>
               <a:rPr lang="en-US" sz="950" dirty="0">
                 <a:solidFill>
-                  <a:srgbClr val="CCCCCC"/>
-                </a:solidFill>
-                <a:latin typeface="Courier New" pitchFamily="34" charset="0"/>
-                <a:ea typeface="Courier New" pitchFamily="34" charset="-122"/>
-                <a:cs typeface="Courier New" pitchFamily="34" charset="-120"/>
-              </a:rPr>
-              <a:t>      </a:t>
-            </a:r>
-            <a:r>
-              <a:rPr lang="en-US" sz="950" dirty="0">
-                <a:solidFill>
                   <a:srgbClr val="569CD6"/>
                 </a:solidFill>
                 <a:latin typeface="Courier New" pitchFamily="34" charset="0"/>
                 <a:ea typeface="Courier New" pitchFamily="34" charset="-122"/>
                 <a:cs typeface="Courier New" pitchFamily="34" charset="-120"/>
               </a:rPr>
-              <a:t>RAISING</a:t>
-            </a:r>
-            <a:r>
-              <a:rPr lang="en-US" sz="950" dirty="0">
-                <a:solidFill>
-                  <a:srgbClr val="CCCCCC"/>
-                </a:solidFill>
-                <a:latin typeface="Courier New" pitchFamily="34" charset="0"/>
-                <a:ea typeface="Courier New" pitchFamily="34" charset="-122"/>
-                <a:cs typeface="Courier New" pitchFamily="34" charset="-120"/>
-              </a:rPr>
-              <a:t>   </a:t>
-            </a:r>
-            <a:r>
-              <a:rPr lang="en-US" sz="950" dirty="0">
-                <a:solidFill>
-                  <a:srgbClr val="4EC9B0"/>
-                </a:solidFill>
-                <a:latin typeface="Courier New" pitchFamily="34" charset="0"/>
-                <a:ea typeface="Courier New" pitchFamily="34" charset="-122"/>
-                <a:cs typeface="Courier New" pitchFamily="34" charset="-120"/>
-              </a:rPr>
-              <a:t>zcx_09_failed</a:t>
-            </a:r>
-            <a:r>
-              <a:rPr lang="en-US" sz="950" dirty="0">
-                <a:solidFill>
-                  <a:srgbClr val="CCCCCC"/>
-                </a:solidFill>
-                <a:latin typeface="Courier New" pitchFamily="34" charset="0"/>
-                <a:ea typeface="Courier New" pitchFamily="34" charset="-122"/>
-                <a:cs typeface="Courier New" pitchFamily="34" charset="-120"/>
-              </a:rPr>
-              <a:t>.</a:t>
-            </a:r>
-            <a:endParaRPr lang="en-US" sz="950" dirty="0"/>
-          </a:p>
-          <a:p>
-            <a:pPr indent="0" marL="0">
-              <a:lnSpc>
-                <a:spcPct val="105000"/>
-              </a:lnSpc>
-              <a:buNone/>
-            </a:pPr>
-            <a:r>
-              <a:rPr lang="en-US" sz="950" dirty="0">
-                <a:solidFill>
-                  <a:srgbClr val="569CD6"/>
-                </a:solidFill>
-                <a:latin typeface="Courier New" pitchFamily="34" charset="0"/>
-                <a:ea typeface="Courier New" pitchFamily="34" charset="-122"/>
-                <a:cs typeface="Courier New" pitchFamily="34" charset="-120"/>
-              </a:rPr>
-              <a:t>ENDCLASS</a:t>
+              <a:t>ENDINTERFACE</a:t>
             </a:r>
             <a:r>
               <a:rPr lang="en-US" sz="950" dirty="0">
@@ -9455,7 +9404,7 @@
                   <a:srgbClr val="89D1FF"/>
                 </a:solidFill>
               </a:rPr>
-              <a:t>AULA 04.09 · SEÇÃO 2</a:t>
+              <a:t>AULA 02.09 · SEÇÃO 2</a:t>
             </a:r>
             <a:endParaRPr lang="en-US" sz="1300" dirty="0"/>
           </a:p>
@@ -9978,7 +9927,7 @@
         <p:spPr>
           <a:xfrm>
             <a:off x="640080" y="1700784"/>
-            <a:ext cx="1920240" cy="292608"/>
+            <a:ext cx="1997964" cy="292608"/>
           </a:xfrm>
           <a:prstGeom prst="rect">
             <a:avLst/>
@@ -9998,7 +9947,7 @@
         <p:spPr>
           <a:xfrm>
             <a:off x="640080" y="1700784"/>
-            <a:ext cx="1920240" cy="27432"/>
+            <a:ext cx="1997964" cy="27432"/>
           </a:xfrm>
           <a:prstGeom prst="rect">
             <a:avLst/>
@@ -10018,7 +9967,7 @@
         <p:spPr>
           <a:xfrm>
             <a:off x="731520" y="1719072"/>
-            <a:ext cx="1737360" cy="274320"/>
+            <a:ext cx="1815084" cy="274320"/>
           </a:xfrm>
           <a:prstGeom prst="rect">
             <a:avLst/>
@@ -10039,7 +9988,7 @@
                   <a:srgbClr val="FFFFFF"/>
                 </a:solidFill>
               </a:rPr>
-              <a:t>zcl_09_doc.clas.abap</a:t>
+              <a:t>zif_pc_auth.intf.abap</a:t>
             </a:r>
             <a:endParaRPr lang="en-US" sz="950" dirty="0"/>
           </a:p>
@@ -10075,7 +10024,7 @@
                   <a:srgbClr val="9DA5B4"/>
                 </a:solidFill>
               </a:rPr>
-              <a:t>ZS4D401_## › ZCL_09_DOC</a:t>
+              <a:t>ZAVBS_PC_COMMON › ZIF_PC_AUTH (com links)</a:t>
             </a:r>
             <a:endParaRPr lang="en-US" sz="850" dirty="0"/>
           </a:p>
@@ -10321,26 +10270,6 @@
             </a:r>
             <a:endParaRPr lang="en-US" sz="1050" dirty="0"/>
           </a:p>
-          <a:p>
-            <a:pPr algn="r" indent="0" marL="0">
-              <a:lnSpc>
-                <a:spcPct val="105000"/>
-              </a:lnSpc>
-              <a:buNone/>
-            </a:pPr>
-            <a:r>
-              <a:rPr lang="en-US" sz="1050" dirty="0">
-                <a:solidFill>
-                  <a:srgbClr val="6E7681"/>
-                </a:solidFill>
-                <a:latin typeface="Courier New" pitchFamily="34" charset="0"/>
-                <a:ea typeface="Courier New" pitchFamily="34" charset="-122"/>
-                <a:cs typeface="Courier New" pitchFamily="34" charset="-120"/>
-              </a:rPr>
-              <a:t>12</a:t>
-            </a:r>
-            <a:endParaRPr lang="en-US" sz="1050" dirty="0"/>
-          </a:p>
         </p:txBody>
       </p:sp>
       <p:sp>
@@ -10379,7 +10308,7 @@
                 <a:ea typeface="Courier New" pitchFamily="34" charset="-122"/>
                 <a:cs typeface="Courier New" pitchFamily="34" charset="-120"/>
               </a:rPr>
-              <a:t>"! &lt;p class="shorttext synchronized"&gt;Airport helper&lt;/p&gt;</a:t>
+              <a:t>"! &lt;p class="shorttext synchronized"&gt;Pedidos de Compras - Verificação de perfil&lt;/p&gt;</a:t>
             </a:r>
             <a:endParaRPr lang="en-US" sz="1050" dirty="0"/>
           </a:p>
@@ -10399,7 +10328,7 @@
                 <a:ea typeface="Courier New" pitchFamily="34" charset="-122"/>
                 <a:cs typeface="Courier New" pitchFamily="34" charset="-120"/>
               </a:rPr>
-              <a:t>"! Reads airports and checks authorizations.</a:t>
+              <a:t>"! Constantes, tipos e métodos públicos de {@link zcl_pc_auth}.</a:t>
             </a:r>
             <a:endParaRPr lang="en-US" sz="1050" dirty="0"/>
           </a:p>
@@ -10419,7 +10348,7 @@
                 <a:ea typeface="Courier New" pitchFamily="34" charset="-122"/>
                 <a:cs typeface="Courier New" pitchFamily="34" charset="-120"/>
               </a:rPr>
-              <a:t>"! See {@link zif_09_constants.DATA:auth_create} for the</a:t>
+              <a:t>"! O modo trial está em {@link zif_pc_constants.DATA:c_modo_trial}.</a:t>
             </a:r>
             <a:endParaRPr lang="en-US" sz="1050" dirty="0"/>
           </a:p>
@@ -10431,15 +10360,70 @@
               <a:buNone/>
             </a:pPr>
             <a:r>
-              <a:rPr lang="en-US" sz="1050" i="1" dirty="0">
-                <a:solidFill>
-                  <a:srgbClr val="6A9955"/>
-                </a:solidFill>
-                <a:latin typeface="Courier New" pitchFamily="34" charset="0"/>
-                <a:ea typeface="Courier New" pitchFamily="34" charset="-122"/>
-                <a:cs typeface="Courier New" pitchFamily="34" charset="-120"/>
-              </a:rPr>
-              <a:t>"! activity used and {@link .METH:get_airports}.</a:t>
+              <a:rPr lang="en-US" sz="1050" dirty="0">
+                <a:solidFill>
+                  <a:srgbClr val="569CD6"/>
+                </a:solidFill>
+                <a:latin typeface="Courier New" pitchFamily="34" charset="0"/>
+                <a:ea typeface="Courier New" pitchFamily="34" charset="-122"/>
+                <a:cs typeface="Courier New" pitchFamily="34" charset="-120"/>
+              </a:rPr>
+              <a:t>INTERFACE</a:t>
+            </a:r>
+            <a:r>
+              <a:rPr lang="en-US" sz="1050" dirty="0">
+                <a:solidFill>
+                  <a:srgbClr val="CCCCCC"/>
+                </a:solidFill>
+                <a:latin typeface="Courier New" pitchFamily="34" charset="0"/>
+                <a:ea typeface="Courier New" pitchFamily="34" charset="-122"/>
+                <a:cs typeface="Courier New" pitchFamily="34" charset="-120"/>
+              </a:rPr>
+              <a:t> </a:t>
+            </a:r>
+            <a:r>
+              <a:rPr lang="en-US" sz="1050" dirty="0">
+                <a:solidFill>
+                  <a:srgbClr val="4EC9B0"/>
+                </a:solidFill>
+                <a:latin typeface="Courier New" pitchFamily="34" charset="0"/>
+                <a:ea typeface="Courier New" pitchFamily="34" charset="-122"/>
+                <a:cs typeface="Courier New" pitchFamily="34" charset="-120"/>
+              </a:rPr>
+              <a:t>zif_pc_auth</a:t>
+            </a:r>
+            <a:r>
+              <a:rPr lang="en-US" sz="1050" dirty="0">
+                <a:solidFill>
+                  <a:srgbClr val="CCCCCC"/>
+                </a:solidFill>
+                <a:latin typeface="Courier New" pitchFamily="34" charset="0"/>
+                <a:ea typeface="Courier New" pitchFamily="34" charset="-122"/>
+                <a:cs typeface="Courier New" pitchFamily="34" charset="-120"/>
+              </a:rPr>
+              <a:t> </a:t>
+            </a:r>
+            <a:r>
+              <a:rPr lang="en-US" sz="1050" dirty="0">
+                <a:solidFill>
+                  <a:srgbClr val="569CD6"/>
+                </a:solidFill>
+                <a:latin typeface="Courier New" pitchFamily="34" charset="0"/>
+                <a:ea typeface="Courier New" pitchFamily="34" charset="-122"/>
+                <a:cs typeface="Courier New" pitchFamily="34" charset="-120"/>
+              </a:rPr>
+              <a:t>PUBLIC</a:t>
+            </a:r>
+            <a:r>
+              <a:rPr lang="en-US" sz="1050" dirty="0">
+                <a:solidFill>
+                  <a:srgbClr val="CCCCCC"/>
+                </a:solidFill>
+                <a:latin typeface="Courier New" pitchFamily="34" charset="0"/>
+                <a:ea typeface="Courier New" pitchFamily="34" charset="-122"/>
+                <a:cs typeface="Courier New" pitchFamily="34" charset="-120"/>
+              </a:rPr>
+              <a:t>.</a:t>
             </a:r>
             <a:endParaRPr lang="en-US" sz="1050" dirty="0"/>
           </a:p>
@@ -10453,156 +10437,13 @@
             <a:r>
               <a:rPr lang="en-US" sz="1050" dirty="0">
                 <a:solidFill>
-                  <a:srgbClr val="569CD6"/>
-                </a:solidFill>
-                <a:latin typeface="Courier New" pitchFamily="34" charset="0"/>
-                <a:ea typeface="Courier New" pitchFamily="34" charset="-122"/>
-                <a:cs typeface="Courier New" pitchFamily="34" charset="-120"/>
-              </a:rPr>
-              <a:t>CLASS</a:t>
-            </a:r>
-            <a:r>
-              <a:rPr lang="en-US" sz="1050" dirty="0">
-                <a:solidFill>
-                  <a:srgbClr val="CCCCCC"/>
+                  <a:srgbClr val="000000"/>
                 </a:solidFill>
                 <a:latin typeface="Courier New" pitchFamily="34" charset="0"/>
                 <a:ea typeface="Courier New" pitchFamily="34" charset="-122"/>
                 <a:cs typeface="Courier New" pitchFamily="34" charset="-120"/>
               </a:rPr>
               <a:t> </a:t>
-            </a:r>
-            <a:r>
-              <a:rPr lang="en-US" sz="1050" dirty="0">
-                <a:solidFill>
-                  <a:srgbClr val="4EC9B0"/>
-                </a:solidFill>
-                <a:latin typeface="Courier New" pitchFamily="34" charset="0"/>
-                <a:ea typeface="Courier New" pitchFamily="34" charset="-122"/>
-                <a:cs typeface="Courier New" pitchFamily="34" charset="-120"/>
-              </a:rPr>
-              <a:t>zcl_09_doc</a:t>
-            </a:r>
-            <a:r>
-              <a:rPr lang="en-US" sz="1050" dirty="0">
-                <a:solidFill>
-                  <a:srgbClr val="CCCCCC"/>
-                </a:solidFill>
-                <a:latin typeface="Courier New" pitchFamily="34" charset="0"/>
-                <a:ea typeface="Courier New" pitchFamily="34" charset="-122"/>
-                <a:cs typeface="Courier New" pitchFamily="34" charset="-120"/>
-              </a:rPr>
-              <a:t> </a:t>
-            </a:r>
-            <a:r>
-              <a:rPr lang="en-US" sz="1050" dirty="0">
-                <a:solidFill>
-                  <a:srgbClr val="569CD6"/>
-                </a:solidFill>
-                <a:latin typeface="Courier New" pitchFamily="34" charset="0"/>
-                <a:ea typeface="Courier New" pitchFamily="34" charset="-122"/>
-                <a:cs typeface="Courier New" pitchFamily="34" charset="-120"/>
-              </a:rPr>
-              <a:t>DEFINITION</a:t>
-            </a:r>
-            <a:r>
-              <a:rPr lang="en-US" sz="1050" dirty="0">
-                <a:solidFill>
-                  <a:srgbClr val="CCCCCC"/>
-                </a:solidFill>
-                <a:latin typeface="Courier New" pitchFamily="34" charset="0"/>
-                <a:ea typeface="Courier New" pitchFamily="34" charset="-122"/>
-                <a:cs typeface="Courier New" pitchFamily="34" charset="-120"/>
-              </a:rPr>
-              <a:t> </a:t>
-            </a:r>
-            <a:r>
-              <a:rPr lang="en-US" sz="1050" dirty="0">
-                <a:solidFill>
-                  <a:srgbClr val="569CD6"/>
-                </a:solidFill>
-                <a:latin typeface="Courier New" pitchFamily="34" charset="0"/>
-                <a:ea typeface="Courier New" pitchFamily="34" charset="-122"/>
-                <a:cs typeface="Courier New" pitchFamily="34" charset="-120"/>
-              </a:rPr>
-              <a:t>PUBLIC</a:t>
-            </a:r>
-            <a:r>
-              <a:rPr lang="en-US" sz="1050" dirty="0">
-                <a:solidFill>
-                  <a:srgbClr val="CCCCCC"/>
-                </a:solidFill>
-                <a:latin typeface="Courier New" pitchFamily="34" charset="0"/>
-                <a:ea typeface="Courier New" pitchFamily="34" charset="-122"/>
-                <a:cs typeface="Courier New" pitchFamily="34" charset="-120"/>
-              </a:rPr>
-              <a:t> </a:t>
-            </a:r>
-            <a:r>
-              <a:rPr lang="en-US" sz="1050" dirty="0">
-                <a:solidFill>
-                  <a:srgbClr val="569CD6"/>
-                </a:solidFill>
-                <a:latin typeface="Courier New" pitchFamily="34" charset="0"/>
-                <a:ea typeface="Courier New" pitchFamily="34" charset="-122"/>
-                <a:cs typeface="Courier New" pitchFamily="34" charset="-120"/>
-              </a:rPr>
-              <a:t>FINAL</a:t>
-            </a:r>
-            <a:r>
-              <a:rPr lang="en-US" sz="1050" dirty="0">
-                <a:solidFill>
-                  <a:srgbClr val="CCCCCC"/>
-                </a:solidFill>
-                <a:latin typeface="Courier New" pitchFamily="34" charset="0"/>
-                <a:ea typeface="Courier New" pitchFamily="34" charset="-122"/>
-                <a:cs typeface="Courier New" pitchFamily="34" charset="-120"/>
-              </a:rPr>
-              <a:t> </a:t>
-            </a:r>
-            <a:r>
-              <a:rPr lang="en-US" sz="1050" dirty="0">
-                <a:solidFill>
-                  <a:srgbClr val="569CD6"/>
-                </a:solidFill>
-                <a:latin typeface="Courier New" pitchFamily="34" charset="0"/>
-                <a:ea typeface="Courier New" pitchFamily="34" charset="-122"/>
-                <a:cs typeface="Courier New" pitchFamily="34" charset="-120"/>
-              </a:rPr>
-              <a:t>CREATE</a:t>
-            </a:r>
-            <a:r>
-              <a:rPr lang="en-US" sz="1050" dirty="0">
-                <a:solidFill>
-                  <a:srgbClr val="CCCCCC"/>
-                </a:solidFill>
-                <a:latin typeface="Courier New" pitchFamily="34" charset="0"/>
-                <a:ea typeface="Courier New" pitchFamily="34" charset="-122"/>
-                <a:cs typeface="Courier New" pitchFamily="34" charset="-120"/>
-              </a:rPr>
-              <a:t> </a:t>
-            </a:r>
-            <a:r>
-              <a:rPr lang="en-US" sz="1050" dirty="0">
-                <a:solidFill>
-                  <a:srgbClr val="569CD6"/>
-                </a:solidFill>
-                <a:latin typeface="Courier New" pitchFamily="34" charset="0"/>
-                <a:ea typeface="Courier New" pitchFamily="34" charset="-122"/>
-                <a:cs typeface="Courier New" pitchFamily="34" charset="-120"/>
-              </a:rPr>
-              <a:t>PUBLIC</a:t>
-            </a:r>
-            <a:r>
-              <a:rPr lang="en-US" sz="1050" dirty="0">
-                <a:solidFill>
-                  <a:srgbClr val="CCCCCC"/>
-                </a:solidFill>
-                <a:latin typeface="Courier New" pitchFamily="34" charset="0"/>
-                <a:ea typeface="Courier New" pitchFamily="34" charset="-122"/>
-                <a:cs typeface="Courier New" pitchFamily="34" charset="-120"/>
-              </a:rPr>
-              <a:t>.</a:t>
             </a:r>
             <a:endParaRPr lang="en-US" sz="1050" dirty="0"/>
           </a:p>
@@ -10625,48 +10466,15 @@
               <a:t>  </a:t>
             </a:r>
             <a:r>
-              <a:rPr lang="en-US" sz="1050" dirty="0">
-                <a:solidFill>
-                  <a:srgbClr val="569CD6"/>
-                </a:solidFill>
-                <a:latin typeface="Courier New" pitchFamily="34" charset="0"/>
-                <a:ea typeface="Courier New" pitchFamily="34" charset="-122"/>
-                <a:cs typeface="Courier New" pitchFamily="34" charset="-120"/>
-              </a:rPr>
-              <a:t>PUBLIC</a:t>
-            </a:r>
-            <a:r>
-              <a:rPr lang="en-US" sz="1050" dirty="0">
-                <a:solidFill>
-                  <a:srgbClr val="CCCCCC"/>
-                </a:solidFill>
-                <a:latin typeface="Courier New" pitchFamily="34" charset="0"/>
-                <a:ea typeface="Courier New" pitchFamily="34" charset="-122"/>
-                <a:cs typeface="Courier New" pitchFamily="34" charset="-120"/>
-              </a:rPr>
-              <a:t> </a:t>
-            </a:r>
-            <a:r>
-              <a:rPr lang="en-US" sz="1050" dirty="0">
-                <a:solidFill>
-                  <a:srgbClr val="569CD6"/>
-                </a:solidFill>
-                <a:latin typeface="Courier New" pitchFamily="34" charset="0"/>
-                <a:ea typeface="Courier New" pitchFamily="34" charset="-122"/>
-                <a:cs typeface="Courier New" pitchFamily="34" charset="-120"/>
-              </a:rPr>
-              <a:t>SECTION</a:t>
-            </a:r>
-            <a:r>
-              <a:rPr lang="en-US" sz="1050" dirty="0">
-                <a:solidFill>
-                  <a:srgbClr val="CCCCCC"/>
-                </a:solidFill>
-                <a:latin typeface="Courier New" pitchFamily="34" charset="0"/>
-                <a:ea typeface="Courier New" pitchFamily="34" charset="-122"/>
-                <a:cs typeface="Courier New" pitchFamily="34" charset="-120"/>
-              </a:rPr>
-              <a:t>.</a:t>
+              <a:rPr lang="en-US" sz="1050" i="1" dirty="0">
+                <a:solidFill>
+                  <a:srgbClr val="6A9955"/>
+                </a:solidFill>
+                <a:latin typeface="Courier New" pitchFamily="34" charset="0"/>
+                <a:ea typeface="Courier New" pitchFamily="34" charset="-122"/>
+                <a:cs typeface="Courier New" pitchFamily="34" charset="-120"/>
+              </a:rPr>
+              <a:t>"! &lt;strong&gt;Criar pedidos&lt;/strong&gt;: atividade 01 de ZPC_PEDIDO.&lt;br&gt;</a:t>
             </a:r>
             <a:endParaRPr lang="en-US" sz="1050" dirty="0"/>
           </a:p>
@@ -10686,7 +10494,7 @@
                 <a:ea typeface="Courier New" pitchFamily="34" charset="-122"/>
                 <a:cs typeface="Courier New" pitchFamily="34" charset="-120"/>
               </a:rPr>
-              <a:t>    </a:t>
+              <a:t>  </a:t>
             </a:r>
             <a:r>
               <a:rPr lang="en-US" sz="1050" i="1" dirty="0">
@@ -10697,7 +10505,7 @@
                 <a:ea typeface="Courier New" pitchFamily="34" charset="-122"/>
                 <a:cs typeface="Courier New" pitchFamily="34" charset="-120"/>
               </a:rPr>
-              <a:t>"! &lt;strong&gt;All airports&lt;/strong&gt; of a country.&lt;br&gt;</a:t>
+              <a:t>"! Sempre verdadeiro no modo trial.</a:t>
             </a:r>
             <a:endParaRPr lang="en-US" sz="1050" dirty="0"/>
           </a:p>
@@ -10717,18 +10525,40 @@
                 <a:ea typeface="Courier New" pitchFamily="34" charset="-122"/>
                 <a:cs typeface="Courier New" pitchFamily="34" charset="-120"/>
               </a:rPr>
-              <a:t>    </a:t>
-            </a:r>
-            <a:r>
-              <a:rPr lang="en-US" sz="1050" i="1" dirty="0">
-                <a:solidFill>
-                  <a:srgbClr val="6A9955"/>
-                </a:solidFill>
-                <a:latin typeface="Courier New" pitchFamily="34" charset="0"/>
-                <a:ea typeface="Courier New" pitchFamily="34" charset="-122"/>
-                <a:cs typeface="Courier New" pitchFamily="34" charset="-120"/>
-              </a:rPr>
-              <a:t>"! Returns an empty table if none is found.</a:t>
+              <a:t>  </a:t>
+            </a:r>
+            <a:r>
+              <a:rPr lang="en-US" sz="1050" dirty="0">
+                <a:solidFill>
+                  <a:srgbClr val="569CD6"/>
+                </a:solidFill>
+                <a:latin typeface="Courier New" pitchFamily="34" charset="0"/>
+                <a:ea typeface="Courier New" pitchFamily="34" charset="-122"/>
+                <a:cs typeface="Courier New" pitchFamily="34" charset="-120"/>
+              </a:rPr>
+              <a:t>CLASS-METHODS</a:t>
+            </a:r>
+            <a:r>
+              <a:rPr lang="en-US" sz="1050" dirty="0">
+                <a:solidFill>
+                  <a:srgbClr val="CCCCCC"/>
+                </a:solidFill>
+                <a:latin typeface="Courier New" pitchFamily="34" charset="0"/>
+                <a:ea typeface="Courier New" pitchFamily="34" charset="-122"/>
+                <a:cs typeface="Courier New" pitchFamily="34" charset="-120"/>
+              </a:rPr>
+              <a:t> </a:t>
+            </a:r>
+            <a:r>
+              <a:rPr lang="en-US" sz="1050" dirty="0">
+                <a:solidFill>
+                  <a:srgbClr val="CCCCCC"/>
+                </a:solidFill>
+                <a:latin typeface="Courier New" pitchFamily="34" charset="0"/>
+                <a:ea typeface="Courier New" pitchFamily="34" charset="-122"/>
+                <a:cs typeface="Courier New" pitchFamily="34" charset="-120"/>
+              </a:rPr>
+              <a:t>pedido_pode_criar</a:t>
             </a:r>
             <a:endParaRPr lang="en-US" sz="1050" dirty="0"/>
           </a:p>
@@ -10759,7 +10589,7 @@
                 <a:ea typeface="Courier New" pitchFamily="34" charset="-122"/>
                 <a:cs typeface="Courier New" pitchFamily="34" charset="-120"/>
               </a:rPr>
-              <a:t>METHODS</a:t>
+              <a:t>RETURNING</a:t>
             </a:r>
             <a:r>
               <a:rPr lang="en-US" sz="1050" dirty="0">
@@ -10775,13 +10605,101 @@
             <a:r>
               <a:rPr lang="en-US" sz="1050" dirty="0">
                 <a:solidFill>
+                  <a:srgbClr val="569CD6"/>
+                </a:solidFill>
+                <a:latin typeface="Courier New" pitchFamily="34" charset="0"/>
+                <a:ea typeface="Courier New" pitchFamily="34" charset="-122"/>
+                <a:cs typeface="Courier New" pitchFamily="34" charset="-120"/>
+              </a:rPr>
+              <a:t>VALUE</a:t>
+            </a:r>
+            <a:r>
+              <a:rPr lang="en-US" sz="1050" dirty="0">
+                <a:solidFill>
                   <a:srgbClr val="CCCCCC"/>
                 </a:solidFill>
                 <a:latin typeface="Courier New" pitchFamily="34" charset="0"/>
                 <a:ea typeface="Courier New" pitchFamily="34" charset="-122"/>
                 <a:cs typeface="Courier New" pitchFamily="34" charset="-120"/>
               </a:rPr>
-              <a:t>get_airports</a:t>
+              <a:t>(</a:t>
+            </a:r>
+            <a:r>
+              <a:rPr lang="en-US" sz="1050" dirty="0">
+                <a:solidFill>
+                  <a:srgbClr val="CCCCCC"/>
+                </a:solidFill>
+                <a:latin typeface="Courier New" pitchFamily="34" charset="0"/>
+                <a:ea typeface="Courier New" pitchFamily="34" charset="-122"/>
+                <a:cs typeface="Courier New" pitchFamily="34" charset="-120"/>
+              </a:rPr>
+              <a:t>rv_autorizado</a:t>
+            </a:r>
+            <a:r>
+              <a:rPr lang="en-US" sz="1050" dirty="0">
+                <a:solidFill>
+                  <a:srgbClr val="CCCCCC"/>
+                </a:solidFill>
+                <a:latin typeface="Courier New" pitchFamily="34" charset="0"/>
+                <a:ea typeface="Courier New" pitchFamily="34" charset="-122"/>
+                <a:cs typeface="Courier New" pitchFamily="34" charset="-120"/>
+              </a:rPr>
+              <a:t>)</a:t>
+            </a:r>
+            <a:r>
+              <a:rPr lang="en-US" sz="1050" dirty="0">
+                <a:solidFill>
+                  <a:srgbClr val="CCCCCC"/>
+                </a:solidFill>
+                <a:latin typeface="Courier New" pitchFamily="34" charset="0"/>
+                <a:ea typeface="Courier New" pitchFamily="34" charset="-122"/>
+                <a:cs typeface="Courier New" pitchFamily="34" charset="-120"/>
+              </a:rPr>
+              <a:t> </a:t>
+            </a:r>
+            <a:r>
+              <a:rPr lang="en-US" sz="1050" dirty="0">
+                <a:solidFill>
+                  <a:srgbClr val="569CD6"/>
+                </a:solidFill>
+                <a:latin typeface="Courier New" pitchFamily="34" charset="0"/>
+                <a:ea typeface="Courier New" pitchFamily="34" charset="-122"/>
+                <a:cs typeface="Courier New" pitchFamily="34" charset="-120"/>
+              </a:rPr>
+              <a:t>TYPE</a:t>
+            </a:r>
+            <a:r>
+              <a:rPr lang="en-US" sz="1050" dirty="0">
+                <a:solidFill>
+                  <a:srgbClr val="CCCCCC"/>
+                </a:solidFill>
+                <a:latin typeface="Courier New" pitchFamily="34" charset="0"/>
+                <a:ea typeface="Courier New" pitchFamily="34" charset="-122"/>
+                <a:cs typeface="Courier New" pitchFamily="34" charset="-120"/>
+              </a:rPr>
+              <a:t> </a:t>
+            </a:r>
+            <a:r>
+              <a:rPr lang="en-US" sz="1050" dirty="0">
+                <a:solidFill>
+                  <a:srgbClr val="CCCCCC"/>
+                </a:solidFill>
+                <a:latin typeface="Courier New" pitchFamily="34" charset="0"/>
+                <a:ea typeface="Courier New" pitchFamily="34" charset="-122"/>
+                <a:cs typeface="Courier New" pitchFamily="34" charset="-120"/>
+              </a:rPr>
+              <a:t>abap_boolean</a:t>
+            </a:r>
+            <a:r>
+              <a:rPr lang="en-US" sz="1050" dirty="0">
+                <a:solidFill>
+                  <a:srgbClr val="CCCCCC"/>
+                </a:solidFill>
+                <a:latin typeface="Courier New" pitchFamily="34" charset="0"/>
+                <a:ea typeface="Courier New" pitchFamily="34" charset="-122"/>
+                <a:cs typeface="Courier New" pitchFamily="34" charset="-120"/>
+              </a:rPr>
+              <a:t>.</a:t>
             </a:r>
             <a:endParaRPr lang="en-US" sz="1050" dirty="0"/>
           </a:p>
@@ -10795,90 +10713,13 @@
             <a:r>
               <a:rPr lang="en-US" sz="1050" dirty="0">
                 <a:solidFill>
-                  <a:srgbClr val="CCCCCC"/>
-                </a:solidFill>
-                <a:latin typeface="Courier New" pitchFamily="34" charset="0"/>
-                <a:ea typeface="Courier New" pitchFamily="34" charset="-122"/>
-                <a:cs typeface="Courier New" pitchFamily="34" charset="-120"/>
-              </a:rPr>
-              <a:t>      </a:t>
-            </a:r>
-            <a:r>
-              <a:rPr lang="en-US" sz="1050" dirty="0">
-                <a:solidFill>
-                  <a:srgbClr val="569CD6"/>
-                </a:solidFill>
-                <a:latin typeface="Courier New" pitchFamily="34" charset="0"/>
-                <a:ea typeface="Courier New" pitchFamily="34" charset="-122"/>
-                <a:cs typeface="Courier New" pitchFamily="34" charset="-120"/>
-              </a:rPr>
-              <a:t>IMPORTING</a:t>
-            </a:r>
-            <a:r>
-              <a:rPr lang="en-US" sz="1050" dirty="0">
-                <a:solidFill>
-                  <a:srgbClr val="CCCCCC"/>
+                  <a:srgbClr val="000000"/>
                 </a:solidFill>
                 <a:latin typeface="Courier New" pitchFamily="34" charset="0"/>
                 <a:ea typeface="Courier New" pitchFamily="34" charset="-122"/>
                 <a:cs typeface="Courier New" pitchFamily="34" charset="-120"/>
               </a:rPr>
               <a:t> </a:t>
-            </a:r>
-            <a:r>
-              <a:rPr lang="en-US" sz="1050" dirty="0">
-                <a:solidFill>
-                  <a:srgbClr val="CCCCCC"/>
-                </a:solidFill>
-                <a:latin typeface="Courier New" pitchFamily="34" charset="0"/>
-                <a:ea typeface="Courier New" pitchFamily="34" charset="-122"/>
-                <a:cs typeface="Courier New" pitchFamily="34" charset="-120"/>
-              </a:rPr>
-              <a:t>i_country</a:t>
-            </a:r>
-            <a:r>
-              <a:rPr lang="en-US" sz="1050" dirty="0">
-                <a:solidFill>
-                  <a:srgbClr val="CCCCCC"/>
-                </a:solidFill>
-                <a:latin typeface="Courier New" pitchFamily="34" charset="0"/>
-                <a:ea typeface="Courier New" pitchFamily="34" charset="-122"/>
-                <a:cs typeface="Courier New" pitchFamily="34" charset="-120"/>
-              </a:rPr>
-              <a:t>       </a:t>
-            </a:r>
-            <a:r>
-              <a:rPr lang="en-US" sz="1050" dirty="0">
-                <a:solidFill>
-                  <a:srgbClr val="569CD6"/>
-                </a:solidFill>
-                <a:latin typeface="Courier New" pitchFamily="34" charset="0"/>
-                <a:ea typeface="Courier New" pitchFamily="34" charset="-122"/>
-                <a:cs typeface="Courier New" pitchFamily="34" charset="-120"/>
-              </a:rPr>
-              <a:t>TYPE</a:t>
-            </a:r>
-            <a:r>
-              <a:rPr lang="en-US" sz="1050" dirty="0">
-                <a:solidFill>
-                  <a:srgbClr val="CCCCCC"/>
-                </a:solidFill>
-                <a:latin typeface="Courier New" pitchFamily="34" charset="0"/>
-                <a:ea typeface="Courier New" pitchFamily="34" charset="-122"/>
-                <a:cs typeface="Courier New" pitchFamily="34" charset="-120"/>
-              </a:rPr>
-              <a:t> </a:t>
-            </a:r>
-            <a:r>
-              <a:rPr lang="en-US" sz="1050" dirty="0">
-                <a:solidFill>
-                  <a:srgbClr val="CCCCCC"/>
-                </a:solidFill>
-                <a:latin typeface="Courier New" pitchFamily="34" charset="0"/>
-                <a:ea typeface="Courier New" pitchFamily="34" charset="-122"/>
-                <a:cs typeface="Courier New" pitchFamily="34" charset="-120"/>
-              </a:rPr>
-              <a:t>land1</a:t>
             </a:r>
             <a:endParaRPr lang="en-US" sz="1050" dirty="0"/>
           </a:p>
@@ -10892,154 +10733,13 @@
             <a:r>
               <a:rPr lang="en-US" sz="1050" dirty="0">
                 <a:solidFill>
-                  <a:srgbClr val="CCCCCC"/>
-                </a:solidFill>
-                <a:latin typeface="Courier New" pitchFamily="34" charset="0"/>
-                <a:ea typeface="Courier New" pitchFamily="34" charset="-122"/>
-                <a:cs typeface="Courier New" pitchFamily="34" charset="-120"/>
-              </a:rPr>
-              <a:t>      </a:t>
-            </a:r>
-            <a:r>
-              <a:rPr lang="en-US" sz="1050" dirty="0">
-                <a:solidFill>
                   <a:srgbClr val="569CD6"/>
                 </a:solidFill>
                 <a:latin typeface="Courier New" pitchFamily="34" charset="0"/>
                 <a:ea typeface="Courier New" pitchFamily="34" charset="-122"/>
                 <a:cs typeface="Courier New" pitchFamily="34" charset="-120"/>
               </a:rPr>
-              <a:t>RETURNING</a:t>
-            </a:r>
-            <a:r>
-              <a:rPr lang="en-US" sz="1050" dirty="0">
-                <a:solidFill>
-                  <a:srgbClr val="CCCCCC"/>
-                </a:solidFill>
-                <a:latin typeface="Courier New" pitchFamily="34" charset="0"/>
-                <a:ea typeface="Courier New" pitchFamily="34" charset="-122"/>
-                <a:cs typeface="Courier New" pitchFamily="34" charset="-120"/>
-              </a:rPr>
-              <a:t> </a:t>
-            </a:r>
-            <a:r>
-              <a:rPr lang="en-US" sz="1050" dirty="0">
-                <a:solidFill>
-                  <a:srgbClr val="569CD6"/>
-                </a:solidFill>
-                <a:latin typeface="Courier New" pitchFamily="34" charset="0"/>
-                <a:ea typeface="Courier New" pitchFamily="34" charset="-122"/>
-                <a:cs typeface="Courier New" pitchFamily="34" charset="-120"/>
-              </a:rPr>
-              <a:t>VALUE</a:t>
-            </a:r>
-            <a:r>
-              <a:rPr lang="en-US" sz="1050" dirty="0">
-                <a:solidFill>
-                  <a:srgbClr val="CCCCCC"/>
-                </a:solidFill>
-                <a:latin typeface="Courier New" pitchFamily="34" charset="0"/>
-                <a:ea typeface="Courier New" pitchFamily="34" charset="-122"/>
-                <a:cs typeface="Courier New" pitchFamily="34" charset="-120"/>
-              </a:rPr>
-              <a:t>(</a:t>
-            </a:r>
-            <a:r>
-              <a:rPr lang="en-US" sz="1050" dirty="0">
-                <a:solidFill>
-                  <a:srgbClr val="CCCCCC"/>
-                </a:solidFill>
-                <a:latin typeface="Courier New" pitchFamily="34" charset="0"/>
-                <a:ea typeface="Courier New" pitchFamily="34" charset="-122"/>
-                <a:cs typeface="Courier New" pitchFamily="34" charset="-120"/>
-              </a:rPr>
-              <a:t>r_result</a:t>
-            </a:r>
-            <a:r>
-              <a:rPr lang="en-US" sz="1050" dirty="0">
-                <a:solidFill>
-                  <a:srgbClr val="CCCCCC"/>
-                </a:solidFill>
-                <a:latin typeface="Courier New" pitchFamily="34" charset="0"/>
-                <a:ea typeface="Courier New" pitchFamily="34" charset="-122"/>
-                <a:cs typeface="Courier New" pitchFamily="34" charset="-120"/>
-              </a:rPr>
-              <a:t>)</a:t>
-            </a:r>
-            <a:r>
-              <a:rPr lang="en-US" sz="1050" dirty="0">
-                <a:solidFill>
-                  <a:srgbClr val="CCCCCC"/>
-                </a:solidFill>
-                <a:latin typeface="Courier New" pitchFamily="34" charset="0"/>
-                <a:ea typeface="Courier New" pitchFamily="34" charset="-122"/>
-                <a:cs typeface="Courier New" pitchFamily="34" charset="-120"/>
-              </a:rPr>
-              <a:t> </a:t>
-            </a:r>
-            <a:r>
-              <a:rPr lang="en-US" sz="1050" dirty="0">
-                <a:solidFill>
-                  <a:srgbClr val="569CD6"/>
-                </a:solidFill>
-                <a:latin typeface="Courier New" pitchFamily="34" charset="0"/>
-                <a:ea typeface="Courier New" pitchFamily="34" charset="-122"/>
-                <a:cs typeface="Courier New" pitchFamily="34" charset="-120"/>
-              </a:rPr>
-              <a:t>TYPE</a:t>
-            </a:r>
-            <a:r>
-              <a:rPr lang="en-US" sz="1050" dirty="0">
-                <a:solidFill>
-                  <a:srgbClr val="CCCCCC"/>
-                </a:solidFill>
-                <a:latin typeface="Courier New" pitchFamily="34" charset="0"/>
-                <a:ea typeface="Courier New" pitchFamily="34" charset="-122"/>
-                <a:cs typeface="Courier New" pitchFamily="34" charset="-120"/>
-              </a:rPr>
-              <a:t> </a:t>
-            </a:r>
-            <a:r>
-              <a:rPr lang="en-US" sz="1050" dirty="0">
-                <a:solidFill>
-                  <a:srgbClr val="4EC9B0"/>
-                </a:solidFill>
-                <a:latin typeface="Courier New" pitchFamily="34" charset="0"/>
-                <a:ea typeface="Courier New" pitchFamily="34" charset="-122"/>
-                <a:cs typeface="Courier New" pitchFamily="34" charset="-120"/>
-              </a:rPr>
-              <a:t>/dmo/t_airport</a:t>
-            </a:r>
-            <a:r>
-              <a:rPr lang="en-US" sz="1050" dirty="0">
-                <a:solidFill>
-                  <a:srgbClr val="CCCCCC"/>
-                </a:solidFill>
-                <a:latin typeface="Courier New" pitchFamily="34" charset="0"/>
-                <a:ea typeface="Courier New" pitchFamily="34" charset="-122"/>
-                <a:cs typeface="Courier New" pitchFamily="34" charset="-120"/>
-              </a:rPr>
-              <a:t>.</a:t>
-            </a:r>
-            <a:endParaRPr lang="en-US" sz="1050" dirty="0"/>
-          </a:p>
-          <a:p>
-            <a:pPr indent="0" marL="0">
-              <a:lnSpc>
-                <a:spcPct val="105000"/>
-              </a:lnSpc>
-              <a:buNone/>
-            </a:pPr>
-            <a:r>
-              <a:rPr lang="en-US" sz="1050" dirty="0">
-                <a:solidFill>
-                  <a:srgbClr val="569CD6"/>
-                </a:solidFill>
-                <a:latin typeface="Courier New" pitchFamily="34" charset="0"/>
-                <a:ea typeface="Courier New" pitchFamily="34" charset="-122"/>
-                <a:cs typeface="Courier New" pitchFamily="34" charset="-120"/>
-              </a:rPr>
-              <a:t>ENDCLASS</a:t>
+              <a:t>ENDINTERFACE</a:t>
             </a:r>
             <a:r>
               <a:rPr lang="en-US" sz="1050" dirty="0">
